--- a/docs/VELO-FAQ-EN.pptx
+++ b/docs/VELO-FAQ-EN.pptx
@@ -1888,7 +1888,7 @@
                 <a:ea typeface="Courier New" pitchFamily="34" charset="-122"/>
                 <a:cs typeface="Courier New" pitchFamily="34" charset="-120"/>
               </a:rPr>
-              <a:t>Verifiable forensic findings without publishing the evidence.</a:t>
+              <a:t>A reputation layer for forensic professionals, without publishing the evidence.</a:t>
             </a:r>
             <a:endParaRPr lang="en-US" sz="900" dirty="0"/>
           </a:p>
@@ -1918,6 +1918,10 @@
             <a:prstDash val="solid"/>
           </a:ln>
         </p:spPr>
+        <p:txBody>
+          <a:bodyPr/>
+          <a:p/>
+        </p:txBody>
       </p:sp>
       <p:sp>
         <p:nvSpPr>
@@ -2084,6 +2088,10 @@
             <a:prstDash val="solid"/>
           </a:ln>
         </p:spPr>
+        <p:txBody>
+          <a:bodyPr/>
+          <a:p/>
+        </p:txBody>
       </p:sp>
       <p:sp>
         <p:nvSpPr>
@@ -2461,6 +2469,10 @@
             <a:prstDash val="solid"/>
           </a:ln>
         </p:spPr>
+        <p:txBody>
+          <a:bodyPr/>
+          <a:p/>
+        </p:txBody>
       </p:sp>
       <p:sp>
         <p:nvSpPr>
@@ -2567,6 +2579,10 @@
             <a:prstDash val="solid"/>
           </a:ln>
         </p:spPr>
+        <p:txBody>
+          <a:bodyPr/>
+          <a:p/>
+        </p:txBody>
       </p:sp>
       <p:sp>
         <p:nvSpPr>
@@ -2673,6 +2689,10 @@
             <a:prstDash val="solid"/>
           </a:ln>
         </p:spPr>
+        <p:txBody>
+          <a:bodyPr/>
+          <a:p/>
+        </p:txBody>
       </p:sp>
       <p:sp>
         <p:nvSpPr>
@@ -3052,6 +3072,10 @@
             </a:outerShdw>
           </a:effectLst>
         </p:spPr>
+        <p:txBody>
+          <a:bodyPr/>
+          <a:p/>
+        </p:txBody>
       </p:sp>
       <p:sp>
         <p:nvSpPr>
@@ -3165,6 +3189,10 @@
             </a:outerShdw>
           </a:effectLst>
         </p:spPr>
+        <p:txBody>
+          <a:bodyPr/>
+          <a:p/>
+        </p:txBody>
       </p:sp>
       <p:sp>
         <p:nvSpPr>
@@ -3278,6 +3306,10 @@
             </a:outerShdw>
           </a:effectLst>
         </p:spPr>
+        <p:txBody>
+          <a:bodyPr/>
+          <a:p/>
+        </p:txBody>
       </p:sp>
       <p:sp>
         <p:nvSpPr>
@@ -3391,6 +3423,10 @@
             </a:outerShdw>
           </a:effectLst>
         </p:spPr>
+        <p:txBody>
+          <a:bodyPr/>
+          <a:p/>
+        </p:txBody>
       </p:sp>
       <p:sp>
         <p:nvSpPr>
@@ -3812,6 +3848,10 @@
             </a:outerShdw>
           </a:effectLst>
         </p:spPr>
+        <p:txBody>
+          <a:bodyPr/>
+          <a:p/>
+        </p:txBody>
       </p:sp>
       <p:sp>
         <p:nvSpPr>
@@ -3925,6 +3965,10 @@
             </a:outerShdw>
           </a:effectLst>
         </p:spPr>
+        <p:txBody>
+          <a:bodyPr/>
+          <a:p/>
+        </p:txBody>
       </p:sp>
       <p:sp>
         <p:nvSpPr>
@@ -4038,6 +4082,10 @@
             </a:outerShdw>
           </a:effectLst>
         </p:spPr>
+        <p:txBody>
+          <a:bodyPr/>
+          <a:p/>
+        </p:txBody>
       </p:sp>
       <p:sp>
         <p:nvSpPr>
@@ -4417,6 +4465,10 @@
             </a:outerShdw>
           </a:effectLst>
         </p:spPr>
+        <p:txBody>
+          <a:bodyPr/>
+          <a:p/>
+        </p:txBody>
       </p:sp>
       <p:sp>
         <p:nvSpPr>
@@ -4530,6 +4582,10 @@
             </a:outerShdw>
           </a:effectLst>
         </p:spPr>
+        <p:txBody>
+          <a:bodyPr/>
+          <a:p/>
+        </p:txBody>
       </p:sp>
       <p:sp>
         <p:nvSpPr>
@@ -4643,6 +4699,10 @@
             </a:outerShdw>
           </a:effectLst>
         </p:spPr>
+        <p:txBody>
+          <a:bodyPr/>
+          <a:p/>
+        </p:txBody>
       </p:sp>
       <p:sp>
         <p:nvSpPr>
@@ -5022,6 +5082,10 @@
             </a:outerShdw>
           </a:effectLst>
         </p:spPr>
+        <p:txBody>
+          <a:bodyPr/>
+          <a:p/>
+        </p:txBody>
       </p:sp>
       <p:sp>
         <p:nvSpPr>
@@ -5161,6 +5225,10 @@
             </a:outerShdw>
           </a:effectLst>
         </p:spPr>
+        <p:txBody>
+          <a:bodyPr/>
+          <a:p/>
+        </p:txBody>
       </p:sp>
       <p:sp>
         <p:nvSpPr>
@@ -5277,6 +5345,10 @@
             </a:outerShdw>
           </a:effectLst>
         </p:spPr>
+        <p:txBody>
+          <a:bodyPr/>
+          <a:p/>
+        </p:txBody>
       </p:sp>
       <p:sp>
         <p:nvSpPr>
@@ -5649,6 +5721,10 @@
             <a:prstDash val="solid"/>
           </a:ln>
         </p:spPr>
+        <p:txBody>
+          <a:bodyPr/>
+          <a:p/>
+        </p:txBody>
       </p:sp>
       <p:sp>
         <p:nvSpPr>
@@ -5755,6 +5831,10 @@
             <a:prstDash val="solid"/>
           </a:ln>
         </p:spPr>
+        <p:txBody>
+          <a:bodyPr/>
+          <a:p/>
+        </p:txBody>
       </p:sp>
       <p:sp>
         <p:nvSpPr>
@@ -5861,6 +5941,10 @@
             <a:prstDash val="solid"/>
           </a:ln>
         </p:spPr>
+        <p:txBody>
+          <a:bodyPr/>
+          <a:p/>
+        </p:txBody>
       </p:sp>
       <p:sp>
         <p:nvSpPr>
@@ -5974,6 +6058,10 @@
             </a:outerShdw>
           </a:effectLst>
         </p:spPr>
+        <p:txBody>
+          <a:bodyPr/>
+          <a:p/>
+        </p:txBody>
       </p:sp>
       <p:sp>
         <p:nvSpPr>
@@ -6353,6 +6441,10 @@
             </a:outerShdw>
           </a:effectLst>
         </p:spPr>
+        <p:txBody>
+          <a:bodyPr/>
+          <a:p/>
+        </p:txBody>
       </p:sp>
       <p:sp>
         <p:nvSpPr>
@@ -6466,6 +6558,10 @@
             </a:outerShdw>
           </a:effectLst>
         </p:spPr>
+        <p:txBody>
+          <a:bodyPr/>
+          <a:p/>
+        </p:txBody>
       </p:sp>
       <p:sp>
         <p:nvSpPr>
@@ -6579,6 +6675,10 @@
             </a:outerShdw>
           </a:effectLst>
         </p:spPr>
+        <p:txBody>
+          <a:bodyPr/>
+          <a:p/>
+        </p:txBody>
       </p:sp>
       <p:sp>
         <p:nvSpPr>
@@ -6958,6 +7058,10 @@
             </a:outerShdw>
           </a:effectLst>
         </p:spPr>
+        <p:txBody>
+          <a:bodyPr/>
+          <a:p/>
+        </p:txBody>
       </p:sp>
       <p:sp>
         <p:nvSpPr>
@@ -7097,6 +7201,10 @@
             </a:outerShdw>
           </a:effectLst>
         </p:spPr>
+        <p:txBody>
+          <a:bodyPr/>
+          <a:p/>
+        </p:txBody>
       </p:sp>
       <p:sp>
         <p:nvSpPr>
@@ -7213,6 +7321,10 @@
             </a:outerShdw>
           </a:effectLst>
         </p:spPr>
+        <p:txBody>
+          <a:bodyPr/>
+          <a:p/>
+        </p:txBody>
       </p:sp>
       <p:sp>
         <p:nvSpPr>
@@ -7592,6 +7704,10 @@
             </a:outerShdw>
           </a:effectLst>
         </p:spPr>
+        <p:txBody>
+          <a:bodyPr/>
+          <a:p/>
+        </p:txBody>
       </p:sp>
       <p:sp>
         <p:nvSpPr>
@@ -7705,6 +7821,10 @@
             </a:outerShdw>
           </a:effectLst>
         </p:spPr>
+        <p:txBody>
+          <a:bodyPr/>
+          <a:p/>
+        </p:txBody>
       </p:sp>
       <p:sp>
         <p:nvSpPr>
@@ -7818,6 +7938,10 @@
             </a:outerShdw>
           </a:effectLst>
         </p:spPr>
+        <p:txBody>
+          <a:bodyPr/>
+          <a:p/>
+        </p:txBody>
       </p:sp>
       <p:sp>
         <p:nvSpPr>
@@ -7931,6 +8055,10 @@
             </a:outerShdw>
           </a:effectLst>
         </p:spPr>
+        <p:txBody>
+          <a:bodyPr/>
+          <a:p/>
+        </p:txBody>
       </p:sp>
       <p:sp>
         <p:nvSpPr>
@@ -8007,7 +8135,7 @@
                 <a:ea typeface="Century Schoolbook" pitchFamily="34" charset="-122"/>
                 <a:cs typeface="Century Schoolbook" pitchFamily="34" charset="-120"/>
               </a:rPr>
-              <a:t>An admissibility rule for corroboration encoded as a ZK circuit constraint, tied to an anonymous accredited-expert credential, in the forensic-judicial domain.</a:t>
+              <a:t>An admissibility rule for corroboration encoded as a ZK circuit constraint, gating every entry in a professional portfolio, in the forensic-judicial domain. The anonymous expert credential is the designed next layer, not part of this build.</a:t>
             </a:r>
             <a:endParaRPr lang="en-US" sz="1500" dirty="0"/>
           </a:p>

--- a/docs/VELO-FAQ-EN.pptx
+++ b/docs/VELO-FAQ-EN.pptx
@@ -1709,7 +1709,7 @@
                 <a:ea typeface="Courier New" pitchFamily="34" charset="-122"/>
                 <a:cs typeface="Courier New" pitchFamily="34" charset="-120"/>
               </a:rPr>
-              <a:t>MIDNIGHT NETWORK · HACKATHON</a:t>
+              <a:t>MIDNIGHT NETWORK</a:t>
             </a:r>
             <a:endParaRPr lang="en-US" sz="1000" dirty="0"/>
           </a:p>
